--- a/assets/pptx/catalog-253.pptx
+++ b/assets/pptx/catalog-253.pptx
@@ -3267,7 +3267,7 @@
                 <a:ea typeface="Ebrima"/>
                 <a:cs typeface="Ebrima"/>
               </a:rPr>
-              <a:t>በቃልኪዳንህ አስባት (4x)</a:t>
+              <a:t>በቃልኪዳንህ አስባት 4x</a:t>
             </a:r>
           </a:p>
         </p:txBody>
@@ -3617,7 +3617,7 @@
                 <a:ea typeface="Ebrima"/>
                 <a:cs typeface="Ebrima"/>
               </a:rPr>
-              <a:t>ፊቱ ልቅረብ ልጸልይ ተግቼ ስለሌሎች (2x)</a:t>
+              <a:t>ፊቱ ልቅረብ ልጸልይ ተግቼ ስለሌሎች 2x</a:t>
             </a:r>
           </a:p>
         </p:txBody>
@@ -3967,7 +3967,7 @@
                 <a:ea typeface="Ebrima"/>
                 <a:cs typeface="Ebrima"/>
               </a:rPr>
-              <a:t>ፊቱ ልቅረብ ልጸልይ ተግቼ ስለሌሎች (2x)</a:t>
+              <a:t>ፊቱ ልቅረብ ልጸልይ ተግቼ ስለሌሎች 2x</a:t>
             </a:r>
           </a:p>
         </p:txBody>
@@ -4299,7 +4299,7 @@
                 <a:ea typeface="Ebrima"/>
                 <a:cs typeface="Ebrima"/>
               </a:rPr>
-              <a:t>ፊቱ ልቅረብ ልጸልይ ተግቼ ስለሌሎች (2x)</a:t>
+              <a:t>ፊቱ ልቅረብ ልጸልይ ተግቼ ስለሌሎች 2x</a:t>
             </a:r>
           </a:p>
         </p:txBody>
@@ -4631,7 +4631,7 @@
                 <a:ea typeface="Ebrima"/>
                 <a:cs typeface="Ebrima"/>
               </a:rPr>
-              <a:t>ፊቱ ልቅረብ ልጸልይ ተግቼ ስለሌሎች (2x)</a:t>
+              <a:t>ፊቱ ልቅረብ ልጸልይ ተግቼ ስለሌሎች 2x</a:t>
             </a:r>
           </a:p>
         </p:txBody>
